--- a/demo-2026-07-01.pptx
+++ b/demo-2026-07-01.pptx
@@ -1805,7 +1805,7 @@
                 <a:ea typeface="Calibri"/>
                 <a:cs typeface="Calibri"/>
               </a:rPr>
-              <a:t>PULSEOPS / PROGRAMMANAGER</a:t>
+              <a:t>OPENPROGRAM</a:t>
             </a:r>
           </a:p>
         </p:txBody>
@@ -1865,7 +1865,7 @@
                 <a:ea typeface="Calibri"/>
                 <a:cs typeface="Calibri"/>
               </a:rPr>
-              <a:t>ProgramManager - Demo</a:t>
+              <a:t>OpenProgram - Demo</a:t>
             </a:r>
           </a:p>
         </p:txBody>
@@ -2721,7 +2721,7 @@
                 <a:ea typeface="Calibri"/>
                 <a:cs typeface="Calibri"/>
               </a:rPr>
-              <a:t>ProgramManager demo | 2026-07-01</a:t>
+              <a:t>OpenProgram demo | 2026-07-01</a:t>
             </a:r>
           </a:p>
         </p:txBody>
@@ -4386,7 +4386,7 @@
                 <a:ea typeface="Calibri"/>
                 <a:cs typeface="Calibri"/>
               </a:rPr>
-              <a:t>ProgramManager demo | 2026-07-01</a:t>
+              <a:t>OpenProgram demo | 2026-07-01</a:t>
             </a:r>
           </a:p>
         </p:txBody>
@@ -5571,7 +5571,7 @@
                 <a:ea typeface="Calibri"/>
                 <a:cs typeface="Calibri"/>
               </a:rPr>
-              <a:t>ProgramManager demo | 2026-07-01</a:t>
+              <a:t>OpenProgram demo | 2026-07-01</a:t>
             </a:r>
           </a:p>
         </p:txBody>
@@ -7176,7 +7176,7 @@
                 <a:ea typeface="Calibri"/>
                 <a:cs typeface="Calibri"/>
               </a:rPr>
-              <a:t>ProgramManager demo | 2026-07-01</a:t>
+              <a:t>OpenProgram demo | 2026-07-01</a:t>
             </a:r>
           </a:p>
         </p:txBody>
@@ -8675,7 +8675,7 @@
                 <a:ea typeface="Calibri"/>
                 <a:cs typeface="Calibri"/>
               </a:rPr>
-              <a:t>ProgramManager demo | 2026-07-01</a:t>
+              <a:t>OpenProgram demo | 2026-07-01</a:t>
             </a:r>
           </a:p>
         </p:txBody>
@@ -9455,7 +9455,7 @@
                 <a:ea typeface="Calibri"/>
                 <a:cs typeface="Calibri"/>
               </a:rPr>
-              <a:t>ProgramManager demo | 2026-07-01</a:t>
+              <a:t>OpenProgram demo | 2026-07-01</a:t>
             </a:r>
           </a:p>
         </p:txBody>
@@ -10520,7 +10520,7 @@
                 <a:ea typeface="Calibri"/>
                 <a:cs typeface="Calibri"/>
               </a:rPr>
-              <a:t>ProgramManager demo | 2026-07-01</a:t>
+              <a:t>OpenProgram demo | 2026-07-01</a:t>
             </a:r>
           </a:p>
         </p:txBody>
@@ -12185,7 +12185,7 @@
                 <a:ea typeface="Calibri"/>
                 <a:cs typeface="Calibri"/>
               </a:rPr>
-              <a:t>ProgramManager demo | 2026-07-01</a:t>
+              <a:t>OpenProgram demo | 2026-07-01</a:t>
             </a:r>
           </a:p>
         </p:txBody>
@@ -13200,7 +13200,7 @@
                 <a:ea typeface="Calibri"/>
                 <a:cs typeface="Calibri"/>
               </a:rPr>
-              <a:t>ProgramManager demo | 2026-07-01</a:t>
+              <a:t>OpenProgram demo | 2026-07-01</a:t>
             </a:r>
           </a:p>
         </p:txBody>
